--- a/decks/Microsoft Foundry Hosted Agents.pptx
+++ b/decks/Microsoft Foundry Hosted Agents.pptx
@@ -130,6 +130,69 @@
     </p:ext>
   </p:extLst>
 </p:presentation>
+</file>
+
+<file path=ppt/changesInfos/changesInfo1.xml><?xml version="1.0" encoding="utf-8"?>
+<pc:chgInfo xmlns:a="http://schemas.openxmlformats.org/drawingml/2006/main" xmlns:r="http://schemas.openxmlformats.org/officeDocument/2006/relationships" xmlns:ac="http://schemas.microsoft.com/office/drawing/2013/main/command" xmlns:pc="http://schemas.microsoft.com/office/powerpoint/2013/main/command">
+  <pc:docChgLst>
+    <pc:chgData clId="Web-{1FB11BEC-AAC0-4A3E-BF99-17C378199144}"/>
+    <pc:docChg chg="modSld">
+      <pc:chgData name="" userId="" providerId="" clId="Web-{1FB11BEC-AAC0-4A3E-BF99-17C378199144}" dt="2026-10-14T13:45:17.386" v="0" actId="34807"/>
+      <pc:docMkLst>
+        <pc:docMk/>
+      </pc:docMkLst>
+      <pc:sldChg chg="modNotesTx">
+        <pc:chgData name="" userId="" providerId="" clId="Web-{1FB11BEC-AAC0-4A3E-BF99-17C378199144}" dt="2026-10-14T13:45:17.386" v="0" actId="34807"/>
+        <pc:sldMkLst>
+          <pc:docMk/>
+          <pc:sldMk cId="0" sldId="256"/>
+        </pc:sldMkLst>
+      </pc:sldChg>
+      <pc:sldChg chg="modNotesTx">
+        <pc:chgData name="" userId="" providerId="" clId="Web-{1FB11BEC-AAC0-4A3E-BF99-17C378199144}" dt="2026-10-14T13:45:17.386" v="0" actId="34807"/>
+        <pc:sldMkLst>
+          <pc:docMk/>
+          <pc:sldMk cId="0" sldId="257"/>
+        </pc:sldMkLst>
+      </pc:sldChg>
+      <pc:sldChg chg="modNotesTx">
+        <pc:chgData name="" userId="" providerId="" clId="Web-{1FB11BEC-AAC0-4A3E-BF99-17C378199144}" dt="2026-10-14T13:45:17.386" v="0" actId="34807"/>
+        <pc:sldMkLst>
+          <pc:docMk/>
+          <pc:sldMk cId="0" sldId="258"/>
+        </pc:sldMkLst>
+      </pc:sldChg>
+      <pc:sldChg chg="modNotesTx">
+        <pc:chgData name="" userId="" providerId="" clId="Web-{1FB11BEC-AAC0-4A3E-BF99-17C378199144}" dt="2026-10-14T13:45:17.386" v="0" actId="34807"/>
+        <pc:sldMkLst>
+          <pc:docMk/>
+          <pc:sldMk cId="0" sldId="259"/>
+        </pc:sldMkLst>
+      </pc:sldChg>
+      <pc:sldChg chg="modNotesTx">
+        <pc:chgData name="" userId="" providerId="" clId="Web-{1FB11BEC-AAC0-4A3E-BF99-17C378199144}" dt="2026-10-14T13:45:17.386" v="0" actId="34807"/>
+        <pc:sldMkLst>
+          <pc:docMk/>
+          <pc:sldMk cId="0" sldId="260"/>
+        </pc:sldMkLst>
+      </pc:sldChg>
+      <pc:sldChg chg="modNotesTx">
+        <pc:chgData name="" userId="" providerId="" clId="Web-{1FB11BEC-AAC0-4A3E-BF99-17C378199144}" dt="2026-10-14T13:45:17.386" v="0" actId="34807"/>
+        <pc:sldMkLst>
+          <pc:docMk/>
+          <pc:sldMk cId="0" sldId="261"/>
+        </pc:sldMkLst>
+      </pc:sldChg>
+      <pc:sldChg chg="modNotesTx">
+        <pc:chgData name="" userId="" providerId="" clId="Web-{1FB11BEC-AAC0-4A3E-BF99-17C378199144}" dt="2026-10-14T13:45:17.386" v="0" actId="34807"/>
+        <pc:sldMkLst>
+          <pc:docMk/>
+          <pc:sldMk cId="0" sldId="262"/>
+        </pc:sldMkLst>
+      </pc:sldChg>
+    </pc:docChg>
+  </pc:docChgLst>
+</pc:chgInfo>
 </file>
 
 <file path=ppt/notesMasters/notesMaster1.xml><?xml version="1.0" encoding="utf-8"?>
@@ -302,28 +365,19 @@
           <a:lstStyle/>
           <a:p>
             <a:r>
-              <a:t>This session covers hosted agents in Foundry Agent Service: the agent type for teams that want to write their own agent code, in their own framework, without running the infrastructure underneath it.</a:t>
-            </a:r>
-          </a:p>
-          <a:p>
-            <a:r>
-              <a:t>Hosted agents have been generally available since 9 July 2026, after a public preview announced in April. A few capabilities around them are still preview, and I mark those with an asterisk: network egress controls, the agent optimizer, and the older A2A version 0.3.</a:t>
-            </a:r>
-          </a:p>
-          <a:p>
-            <a:r>
-              <a:t>The plan is six content slides. First the problem and what the platform takes over. Then the architecture and the request flow. Then the code layer between the agent and the runtime, which some sources call the harness and the official documentation calls the protocol libraries, together with tools. Then deployment, sizing and cost. Then the comparison with prompt agents, which is the first question every customer asks. And finally private networking, which is the second.</a:t>
-            </a:r>
-          </a:p>
-          <a:p>
-            <a:r>
-              <a:t>Every fact was checked against the official Microsoft documentation on 9 October 2026.</a:t>
-            </a:r>
-          </a:p>
-          <a:p>
-            <a:r>
-              <a:t>Likely question: is this the same as Azure Container Apps? No. It is an agent runtime with per-session sandboxes, agent identity and Foundry endpoints, not a general container platform.</a:t>
-            </a:r>
+              <a:rPr lang="en-US"/>
+              <a:t>This session covers hosted agents in Foundry Agent Service: the agent type for teams that want to run their own agent code, built with their own framework, without operating the infrastructure underneath it.
+Hosted agents have been generally available since 9 July 2026, after a public preview announced in April. A few capabilities around them are still in preview and are marked with an asterisk on the slides: network egress controls, the agent optimizer and the older A2A protocol version 0.3.
+The session follows a simple path in six content slides.
+We begin with the problem hosted agents solve and the division of responsibility between the platform and the development team.
+We then look at the architecture: how a deployed version serves requests, and how each session runs in its own sandbox.
+Next, we examine the layer between agent code and the runtime. Some sources call it the harness; the official documentation calls it the protocol libraries. This part also covers how a hosted agent reaches Foundry tools.
+The fourth part covers deployment, sizing and cost.
+We then compare prompt agents and hosted agents, which is usually the first question in an architecture discussion, and close with hosted agents in private networks, which is usually the second.
+All facts were checked against the official Microsoft documentation and public GitHub samples on 9 October 2026.
+The overall narrative is simple: a hosted agent keeps the flexibility of custom code, while the platform takes over the operational concerns that teams would otherwise build themselves. It is an agent runtime rather than a general container platform: it adds per-session sandboxes, an agent identity and Foundry endpoints, which a general service such as Azure Container Apps does not provide.</a:t>
+            </a:r>
+            <a:endParaRPr/>
           </a:p>
         </p:txBody>
       </p:sp>
@@ -392,33 +446,21 @@
           <a:lstStyle/>
           <a:p>
             <a:r>
-              <a:t>The takeaway: a hosted agent is your own agent code, and Foundry runs it for you.</a:t>
-            </a:r>
-          </a:p>
-          <a:p>
-            <a:r>
-              <a:t>On the left are the cross-cutting concerns the official documentation lists for agents built with open-source frameworks: containerization, web server setup, security, memory persistence, scaling, instrumentation and version rollbacks. Every team that self-hosts an agent rebuilds these, and they are harder across mixed cloud environments.</a:t>
-            </a:r>
-          </a:p>
-          <a:p>
-            <a:r>
-              <a:t>On the right is the division of responsibility. The development team owns the code inside the sandbox: the orchestration logic, the container image or a zip of source that Foundry builds into an image, the CPU and memory per session, and the role assignments that give the agent access to data and tools. The platform owns everything around it: a dedicated endpoint, a dedicated Microsoft Entra agent identity created at deploy time, per-session scaling, session state and conversation history, tracing, and immutable versions.</a:t>
-            </a:r>
-          </a:p>
-          <a:p>
-            <a:r>
-              <a:t>Reasoning comes from Foundry models; the code does the orchestration. Python and C# are supported, with any framework.</a:t>
-            </a:r>
-          </a:p>
-          <a:p>
-            <a:r>
-              <a:t>Source: learn.microsoft.com/azure/foundry/agents/concepts/hosted-agents.</a:t>
-            </a:r>
-          </a:p>
-          <a:p>
-            <a:r>
-              <a:t>Likely question: do we still need a container registry? Yes, Azure Container Registry holds the image, unless Foundry builds it from a zip.</a:t>
-            </a:r>
+              <a:rPr lang="en-US"/>
+              <a:t>This slide explains what a hosted agent is and why the managed runtime matters.
+The core idea is that a hosted agent is the team's own agent code, packaged as a container, and Foundry Agent Service runs it on Microsoft-managed infrastructure.
+The slide is organised in three parts.
+First, the concerns without a managed runtime.
+On the left are the cross-cutting concerns the official documentation lists for agents built on open-source frameworks: containerisation, web server setup, security, memory persistence, scaling, instrumentation and version rollbacks. A team that self-hosts an agent builds and operates each of these itself, and the effort grows across heterogeneous cloud environments.
+Second, what a hosted agent is.
+It is a containerised agent application that runs on Foundry Agent Service. The code can use any framework, in Python or C#, while reasoning comes from Foundry models. The platform provides the endpoint, identity, scaling, session state and observability. The capability has been generally available since 9 July 2026.
+Third, the division of responsibility.
+The platform owns everything around the code: a dedicated endpoint per agent, a Microsoft Entra agent identity created at deployment time, per-session scaling, session state and conversation history, tracing to Application Insights, and immutable versions with their lifecycle.
+The development team owns what runs inside the session sandbox: the orchestration logic, the container image or a .zip of source that Foundry builds into an image, the CPU and memory per session, and the role assignments that give the agent identity access to tools and data.
+A container registry remains part of the design. Azure Container Registry holds the image, unless Foundry builds it from a .zip of source.
+The key takeaway is that a hosted agent changes who operates the agent, not who writes it: the development team keeps full control of the logic, and the platform takes over the infrastructure concerns listed on the left.</a:t>
+            </a:r>
+            <a:endParaRPr/>
           </a:p>
         </p:txBody>
       </p:sp>
@@ -487,48 +529,24 @@
           <a:lstStyle/>
           <a:p>
             <a:r>
-              <a:t>Let me walk the numbers.</a:t>
-            </a:r>
-          </a:p>
-          <a:p>
-            <a:r>
-              <a:t>Step one: the Azure Developer CLI or the Foundry Toolkit for VS Code builds the container and pushes it to Azure Container Registry; Foundry can also build it from a zip of source.</a:t>
-            </a:r>
-          </a:p>
-          <a:p>
-            <a:r>
-              <a:t>Step two: creating a version records an immutable snapshot: image, CPU and memory, environment variables and protocols. An endpoint serves one version at a time, with 100% of traffic; traffic splitting isn't supported.</a:t>
-            </a:r>
-          </a:p>
-          <a:p>
-            <a:r>
-              <a:t>Step three: callers reach the agent's dedicated endpoint, on the protocols the version declares.</a:t>
-            </a:r>
-          </a:p>
-          <a:p>
-            <a:r>
-              <a:t>Step four: the platform routes the request to a session sandbox. Each session is VM-isolated and keeps $HOME and uploaded files across turns and idle periods.</a:t>
-            </a:r>
-          </a:p>
-          <a:p>
-            <a:r>
-              <a:t>Step five: the agent code calls Foundry models, tools through the Toolbox MCP endpoint, and Azure resources, all as its own Microsoft Entra agent identity.</a:t>
-            </a:r>
-          </a:p>
-          <a:p>
-            <a:r>
-              <a:t>Step six: the platform stores conversations, session state and an optional key-value state store, and traces flow to Application Insights automatically.</a:t>
-            </a:r>
-          </a:p>
-          <a:p>
-            <a:r>
-              <a:t>Presenter note: verify which identity pulls the image; the documentation pages differ between the project managed identity and the agent identity.</a:t>
-            </a:r>
-          </a:p>
-          <a:p>
-            <a:r>
-              <a:t>Likely question: can two versions run side by side? Not on one endpoint; create a separate agent for a canary.</a:t>
-            </a:r>
+              <a:rPr lang="en-US"/>
+              <a:t>This slide shows the architecture of a hosted agent. Read it as two paths: the deployment path from developer tooling to an agent version, and the request path from a caller to a session sandbox.
+First, the image is built and stored.
+The Azure Developer CLI or the Foundry Toolkit for Visual Studio Code builds the container and pushes it to Azure Container Registry. Foundry can also build the image from a .zip of source.
+Second, a version is created.
+Creating a version records an immutable snapshot: the image, CPU and memory, environment variables and the protocols the agent supports. An endpoint serves one version at a time, with all of the traffic. Traffic splitting is not supported, so a canary release needs a separate agent.
+Third, callers reach the agent endpoint.
+Each agent has a dedicated endpoint, and callers use the protocols the version declares: OpenAI-compatible SDKs over Responses, webhooks and custom clients over Invocations, Teams and Microsoft 365 through the Activity protocol, and other agents through A2A.
+Fourth, the platform routes the request to a session sandbox.
+Each session runs in its own VM-isolated sandbox. The protocol library inside the container runs the server, answers health checks and emits OpenTelemetry. $HOME and uploaded files persist across turns and idle periods.
+Fifth, the agent code reaches models, tools and Azure resources.
+It calls Foundry models through the project endpoint, tools through the Toolbox MCP endpoint, and Azure resources through role assignments, always as its own Microsoft Entra agent identity.
+Sixth, the platform manages state and telemetry.
+Conversation history, session state and an optional key-value state store are kept by the platform, and traces flow to Application Insights automatically.
+One point remains open in the documentation: the pages differ on whether the project managed identity or the agent identity pulls the image from the registry, so this should be confirmed before presenting.
+The architectural principle is a clear split of roles: the version defines what runs, the endpoint defines how it is reached, and the session sandbox isolates every conversation.</a:t>
+            </a:r>
+            <a:endParaRPr/>
           </a:p>
         </p:txBody>
       </p:sp>
@@ -597,33 +615,20 @@
           <a:lstStyle/>
           <a:p>
             <a:r>
-              <a:t>Some sources call the code between the agent and the runtime a harness. The official documentation calls it the protocol libraries: lightweight packages that run the HTTP or WebSocket server, answer health checks and emit OpenTelemetry, so the agent code only implements handlers. There is one package per protocol family, in Python and .NET.</a:t>
-            </a:r>
-          </a:p>
-          <a:p>
-            <a:r>
-              <a:t>The protocol decides how much the platform manages. Responses is the default: an OpenAI-compatible contract with platform-managed conversation history, streaming and background mode, and it is what the platform bridges to the Activity protocol for Teams. Invocations takes arbitrary JSON, for webhooks or non-conversational work, and the agent manages its own state. The WebSocket variant is for real-time voice; connections last about thirty minutes and frames are capped at one megabyte. One agent can expose several protocols. A2A version 1.0 is generally available; version 0.3 is preview.</a:t>
-            </a:r>
-          </a:p>
-          <a:p>
-            <a:r>
-              <a:t>Tools are not attached to the agent definition. The agent connects to a Toolbox MCP endpoint in the project, which consolidates authentication.</a:t>
-            </a:r>
-          </a:p>
-          <a:p>
-            <a:r>
-              <a:t>The example uses the Agent Framework hosting package, still prerelease in Python.</a:t>
-            </a:r>
-          </a:p>
-          <a:p>
-            <a:r>
-              <a:t>Presenter note: verify the status of skills for hosted agents.</a:t>
-            </a:r>
-          </a:p>
-          <a:p>
-            <a:r>
-              <a:t>Likely question: can we use Node.js? Not today; Python and C#.</a:t>
-            </a:r>
+              <a:rPr lang="en-US"/>
+              <a:t>This slide covers the layer between the agent code and the Foundry runtime, and the way a hosted agent reaches Foundry tools.
+The core idea is that the protocol decides how much the platform manages, while the protocol libraries remove the server code that teams would otherwise write.
+First, the protocols the endpoint exposes.
+Responses is the default. It is an OpenAI-compatible contract with platform-managed conversation history, streaming and background mode, and it is the protocol the platform bridges to the Activity protocol for Teams and Microsoft 365. Invocations accepts any JSON payload, with the schema defined by the agent, which suits webhooks, extraction, AG-UI and protocol bridges; in this case the agent manages its own state. The WebSocket variant of Invocations provides a two-way stream on one connection for real-time voice with Pipecat, LiveKit or Voice Live; connections last about thirty minutes and frames are capped at one megabyte. A2A supports delegation from other agents: version 1.0 is generally available, and version 0.3 remains in preview. One agent can expose several protocols at once.
+Second, the protocol libraries.
+Some sources call this layer the harness. The official documentation calls it the protocol libraries: lightweight packages that run the HTTP or WebSocket server, answer health checks and emit OpenTelemetry, so the agent code only implements handlers. There is one package per protocol family, in Python and .NET.
+Third, the agent frameworks.
+Any framework in Python or C# can run inside the container, including Agent Framework, LangGraph, the OpenAI Agents SDK, the Anthropic Agent SDK, the GitHub Copilot SDK or custom code. The example shows the Agent Framework hosting package, which is still prerelease in Python. Node.js is not supported today.
+Fourth, tools.
+Tools are not attached to the hosted agent definition. The agent connects to a Toolbox MCP endpoint in the project, which consolidates authentication for Code Interpreter, Web Search, Azure AI Search, OpenAPI, MCP, A2A and skills. The status of skills for hosted agents should be confirmed before presenting.
+The key takeaway is that the development team writes handlers and orchestration logic, while the protocol libraries and the Toolbox take care of serving, telemetry and tool authentication.</a:t>
+            </a:r>
+            <a:endParaRPr/>
           </a:p>
         </p:txBody>
       </p:sp>
@@ -692,33 +697,18 @@
           <a:lstStyle/>
           <a:p>
             <a:r>
-              <a:t>Three groups of decisions: how to deploy, how big each session is, and what drives the bill.</a:t>
-            </a:r>
-          </a:p>
-          <a:p>
-            <a:r>
-              <a:t>Deployment. The Azure Developer CLI is the main route: init scaffolds, provision creates resources, deploy builds the image in the registry and creates a version. The Foundry Toolkit for VS Code does the same from the editor; the SDK, REST and Terraform cover automation.</a:t>
-            </a:r>
-          </a:p>
-          <a:p>
-            <a:r>
-              <a:t>Sizing. Choose one of three sizes per version. The size applies to each session, not to the agent, and there are no replicas: the platform creates a sandbox per session and releases compute after the idle timeout, between 2 and 60 minutes. Concurrent sessions are a per-subscription, per-region quota, raised through support.</a:t>
-            </a:r>
-          </a:p>
-          <a:p>
-            <a:r>
-              <a:t>Cost. Compute is billed on CPU and memory consumed by active sessions, plus model tokens, plus tools. Right-size from Application Insights, at about seventy per cent sustained use.</a:t>
-            </a:r>
-          </a:p>
-          <a:p>
-            <a:r>
-              <a:t>Presenter note: verify current per-hour rates on the Foundry Agent Service pricing page before quoting numbers; they were not published for the default region on 9 October.</a:t>
-            </a:r>
-          </a:p>
-          <a:p>
-            <a:r>
-              <a:t>Likely question: is there a charge when nobody uses the agent? No compute charge once sessions are idle and deprovisioned.</a:t>
-            </a:r>
+              <a:rPr lang="en-US"/>
+              <a:t>This slide groups three sets of decisions: how a version is deployed, how one session is sized, and what drives the bill.
+First, deployment.
+The Azure Developer CLI is the main route: azd ai agent init scaffolds the project, azd provision creates the resources, and azd deploy builds the image in the registry and creates a version. The Foundry Toolkit for Visual Studio Code does the same from the editor, while the SDK, REST and Terraform cover automation. The image is a linux/amd64 container image, or a .zip of source that Foundry builds. Versions are immutable, up to 1,000 per agent, and one version serves all traffic.
+Second, sizing and sessions.
+Each version uses one of three sizes: 0.5 vCPU with 1 GiB, 1 vCPU with 2 GiB, or 2 vCPU with 4 GiB. The size applies to each session, not to the agent as a whole. There are no replicas or warm pools to size: the platform creates a sandbox per session and releases compute after an idle timeout between 2 and 60 minutes, 15 by default, while the session state is persisted. A session is deleted after 30 days without activity. Concurrent sessions are a quota per subscription and region, 2,000 in seven regions and 1,000 elsewhere, and can be raised through support. Hosted agents are available in 31 regions, including Switzerland North and Switzerland West.
+Third, cost drivers.
+Compute is billed on the vCPU-hours and memory GiB-hours of active sessions, plus model tokens at the deployment's rate, plus tools such as Code Interpreter per session. Because the size applies per session, oversizing multiplies with concurrency. Right-sizing is done from Application Insights: raise the size above about seventy per cent sustained use, and lower it when use stays well below. Once idle sessions have been released, there is no compute charge.
+Current per-hour rates were not published for the default region on 9 October, so the Foundry Agent Service pricing page should be checked before quoting numbers.
+The key takeaway is that cost follows concurrency: the session size is the main lever, and it should be set from measured usage rather than estimated up front.</a:t>
+            </a:r>
+            <a:endParaRPr/>
           </a:p>
         </p:txBody>
       </p:sp>
@@ -787,33 +777,20 @@
           <a:lstStyle/>
           <a:p>
             <a:r>
-              <a:t>Both agent types live in Foundry Agent Service, with a managed endpoint, an Entra agent identity, and Foundry models and tools. The difference is who writes the logic.</a:t>
-            </a:r>
-          </a:p>
-          <a:p>
-            <a:r>
-              <a:t>A prompt agent is a definition: instructions, a model and tools, authored in the portal, SDK or REST, with no code or compute to manage. The documentation positions it for fast starts, internal tools and production agents without custom orchestration.</a:t>
-            </a:r>
-          </a:p>
-          <a:p>
-            <a:r>
-              <a:t>A hosted agent is code. The team maintains the agent logic and chooses a sandbox size; in return it gets any framework, more protocols, session files and a state store, and control over compute. Cost adds container compute to inference and tools.</a:t>
-            </a:r>
-          </a:p>
-          <a:p>
-            <a:r>
-              <a:t>On the right are the five documented reasons to choose a hosted agent. If none applies, a prompt agent is the shorter path.</a:t>
-            </a:r>
-          </a:p>
-          <a:p>
-            <a:r>
-              <a:t>Two notes. Voice-based prompt agents are a third type, in preview. And the official documentation doesn't compare hosted agents with self-hosting on Container Apps or AKS; the honest comparison is the list of concerns on slide 2 that the team would otherwise own.</a:t>
-            </a:r>
-          </a:p>
-          <a:p>
-            <a:r>
-              <a:t>Likely question: can a prompt agent call a hosted agent? Yes, through A2A or as a tool, for example to wrap custom code.</a:t>
-            </a:r>
+              <a:rPr lang="en-US"/>
+              <a:t>This slide compares the two agent types in Foundry Agent Service by asking the same questions of both.
+The core idea is that both types share the platform: a managed endpoint, a Microsoft Entra agent identity, and access to Foundry models and tools. The difference is who writes the logic.
+First, the prompt agent.
+A prompt agent is a definition: instructions, a model and tools, authored in the Foundry portal, the SDK or REST. There is no code to maintain and no compute to manage. It speaks the Responses protocol, keeps conversation history and attaches tools directly to the agent definition. Cost consists of inference and tools. The official documentation positions it for fast starts, internal tools and production agents that need no custom orchestration.
+Second, the hosted agent.
+A hosted agent is code. The development team maintains the agent logic in any framework, in Python or C#, and chooses a sandbox size per version. In return it gains more protocols, including Invocations, WebSocket, Activity and A2A, session files and a state store, tools through the Toolbox MCP endpoint, and control over compute. Cost adds container compute to inference and tools.
+Third, the selection criteria.
+The lower part of the slide lists the five documented reasons to choose a hosted agent: own code, custom protocols, compute control, stateful work and long-lived work. If none of these applies, a prompt agent is the shorter path: faster to build, with nothing to run.
+Two further points complete the picture. Voice-based prompt agents are a third agent type, currently in preview. And the official documentation does not compare hosted agents with self-hosting on Azure Container Apps or AKS; the fair comparison is the list of concerns on slide 2 that the development team would otherwise own.
+The two types also work together: a prompt agent can call a hosted agent through A2A or as a tool, for example to wrap custom code.
+The key takeaway is to start with a prompt agent and move to a hosted agent only when one of the five criteria applies.</a:t>
+            </a:r>
+            <a:endParaRPr/>
           </a:p>
         </p:txBody>
       </p:sp>
@@ -882,38 +859,21 @@
           <a:lstStyle/>
           <a:p>
             <a:r>
-              <a:t>Hosted agents support network-isolated Foundry resources. The customer provides a subnet delegated to Microsoft.App/environments, /24 recommended, one per Foundry resource, and each session sandbox connects to it for outbound traffic. The decision must be made early: network injection has to be configured when the Foundry account is created; it can't be added later.</a:t>
-            </a:r>
-          </a:p>
-          <a:p>
-            <a:r>
-              <a:t>Step one: deployment runs from inside the network, typically a self-hosted GitHub or Azure DevOps runner, and pushes to a private container registry. Projects created before 25 June 2026 still need the registry reachable publicly.</a:t>
-            </a:r>
-          </a:p>
-          <a:p>
-            <a:r>
-              <a:t>Step two: sandboxes reach the Foundry account, the registry and the standard-setup data stores, Cosmos DB, Storage and AI Search, through private endpoints, so conversation data stays in the customer's own resources.</a:t>
-            </a:r>
-          </a:p>
-          <a:p>
-            <a:r>
-              <a:t>Step three: to publish to Teams without opening the account, enable_m365_public_endpoint creates a scoped, IP-filtered exception for the Activity route only, through Azure Bot Service.</a:t>
-            </a:r>
-          </a:p>
-          <a:p>
-            <a:r>
-              <a:t>Egress controls, in preview, add host allow and deny rules inside the sandbox: start in Audit, then Enforce.</a:t>
-            </a:r>
-          </a:p>
-          <a:p>
-            <a:r>
-              <a:t>Presenter note: verify whether the agent endpoint is private when deployed with azd; the documentation pages differ.</a:t>
-            </a:r>
-          </a:p>
-          <a:p>
-            <a:r>
-              <a:t>Likely question: does the agent run inside our VNet? Its outbound traffic does, through the delegated subnet.</a:t>
-            </a:r>
+              <a:rPr lang="en-US"/>
+              <a:t>This slide shows how hosted agents run inside a private network. Read it from the customer virtual network outwards: the delegated subnet, the private endpoints, and the single scoped exception for Microsoft 365.
+The core idea is that each session sandbox connects to a subnet in the customer's virtual network for outbound traffic, while Foundry and its data stores are reached through private endpoints.
+The design decision comes first. Network injection must be configured when the Foundry account is created and cannot be added later. The customer provides a subnet delegated to Microsoft.App/environments, with a /24 recommended, one agent subnet per Foundry resource, in the same region as Foundry.
+First, deployment from inside the network.
+Builds and deployments run from a self-hosted GitHub or Azure DevOps runner inside the network and push to a private container registry. Projects created before 25 June 2026 still need the registry to be reachable publicly.
+Second, private access to Foundry and data.
+Sandboxes reach the Foundry account, the container registry and the standard-setup data stores, Cosmos DB, Storage and Azure AI Search, through private endpoints, so conversation data stays in the customer's own resources.
+Third, publishing to Teams and Microsoft 365.
+To publish without opening the account, enable_m365_public_endpoint creates a scoped, IP-filtered exception for the Activity protocol route only, through Azure Bot Service. The account itself stays private.
+The security layers then add up: the Entra agent identity with role-based access, network injection, egress controls, a private registry, data in customer-owned resources, and guardrails through the Responsible AI policy. Egress controls, in preview, add allow and deny rules per host inside the sandbox, up to 480 rules, and fail closed; they should start in Audit mode before moving to Enforce.
+Three limits apply: one agent subnet per Foundry resource, Code Interpreter without file upload or download, and no streaming or citations in Teams. The documentation also differs on whether the agent endpoint is private when deployed with azd, so this should be confirmed before presenting.
+The key takeaway is that the agent's outbound traffic runs inside the customer network, and the only inbound exception is the scoped route that Microsoft 365 requires.</a:t>
+            </a:r>
+            <a:endParaRPr/>
           </a:p>
         </p:txBody>
       </p:sp>
@@ -1116,7 +1076,7 @@
           <a:p>
             <a:fld id="{5BCAD085-E8A6-8845-BD4E-CB4CCA059FC4}" type="datetimeFigureOut">
               <a:rPr lang="en-US" smtClean="0"/>
-              <a:t>10/11/2026</a:t>
+              <a:t>10/14/2026</a:t>
             </a:fld>
             <a:endParaRPr lang="en-US"/>
           </a:p>
@@ -1284,7 +1244,7 @@
           <a:p>
             <a:fld id="{5BCAD085-E8A6-8845-BD4E-CB4CCA059FC4}" type="datetimeFigureOut">
               <a:rPr lang="en-US" smtClean="0"/>
-              <a:t>10/11/2026</a:t>
+              <a:t>10/14/2026</a:t>
             </a:fld>
             <a:endParaRPr lang="en-US"/>
           </a:p>
@@ -1462,7 +1422,7 @@
           <a:p>
             <a:fld id="{5BCAD085-E8A6-8845-BD4E-CB4CCA059FC4}" type="datetimeFigureOut">
               <a:rPr lang="en-US" smtClean="0"/>
-              <a:t>10/11/2026</a:t>
+              <a:t>10/14/2026</a:t>
             </a:fld>
             <a:endParaRPr lang="en-US"/>
           </a:p>
@@ -1630,7 +1590,7 @@
           <a:p>
             <a:fld id="{5BCAD085-E8A6-8845-BD4E-CB4CCA059FC4}" type="datetimeFigureOut">
               <a:rPr lang="en-US" smtClean="0"/>
-              <a:t>10/11/2026</a:t>
+              <a:t>10/14/2026</a:t>
             </a:fld>
             <a:endParaRPr lang="en-US"/>
           </a:p>
@@ -1875,7 +1835,7 @@
           <a:p>
             <a:fld id="{5BCAD085-E8A6-8845-BD4E-CB4CCA059FC4}" type="datetimeFigureOut">
               <a:rPr lang="en-US" smtClean="0"/>
-              <a:t>10/11/2026</a:t>
+              <a:t>10/14/2026</a:t>
             </a:fld>
             <a:endParaRPr lang="en-US"/>
           </a:p>
@@ -2160,7 +2120,7 @@
           <a:p>
             <a:fld id="{5BCAD085-E8A6-8845-BD4E-CB4CCA059FC4}" type="datetimeFigureOut">
               <a:rPr lang="en-US" smtClean="0"/>
-              <a:t>10/11/2026</a:t>
+              <a:t>10/14/2026</a:t>
             </a:fld>
             <a:endParaRPr lang="en-US"/>
           </a:p>
@@ -2579,7 +2539,7 @@
           <a:p>
             <a:fld id="{5BCAD085-E8A6-8845-BD4E-CB4CCA059FC4}" type="datetimeFigureOut">
               <a:rPr lang="en-US" smtClean="0"/>
-              <a:t>10/11/2026</a:t>
+              <a:t>10/14/2026</a:t>
             </a:fld>
             <a:endParaRPr lang="en-US"/>
           </a:p>
@@ -2696,7 +2656,7 @@
           <a:p>
             <a:fld id="{5BCAD085-E8A6-8845-BD4E-CB4CCA059FC4}" type="datetimeFigureOut">
               <a:rPr lang="en-US" smtClean="0"/>
-              <a:t>10/11/2026</a:t>
+              <a:t>10/14/2026</a:t>
             </a:fld>
             <a:endParaRPr lang="en-US"/>
           </a:p>
@@ -2791,7 +2751,7 @@
           <a:p>
             <a:fld id="{5BCAD085-E8A6-8845-BD4E-CB4CCA059FC4}" type="datetimeFigureOut">
               <a:rPr lang="en-US" smtClean="0"/>
-              <a:t>10/11/2026</a:t>
+              <a:t>10/14/2026</a:t>
             </a:fld>
             <a:endParaRPr lang="en-US"/>
           </a:p>
@@ -3066,7 +3026,7 @@
           <a:p>
             <a:fld id="{5BCAD085-E8A6-8845-BD4E-CB4CCA059FC4}" type="datetimeFigureOut">
               <a:rPr lang="en-US" smtClean="0"/>
-              <a:t>10/11/2026</a:t>
+              <a:t>10/14/2026</a:t>
             </a:fld>
             <a:endParaRPr lang="en-US"/>
           </a:p>
@@ -3318,7 +3278,7 @@
           <a:p>
             <a:fld id="{5BCAD085-E8A6-8845-BD4E-CB4CCA059FC4}" type="datetimeFigureOut">
               <a:rPr lang="en-US" smtClean="0"/>
-              <a:t>10/11/2026</a:t>
+              <a:t>10/14/2026</a:t>
             </a:fld>
             <a:endParaRPr lang="en-US"/>
           </a:p>
@@ -3529,7 +3489,7 @@
           <a:p>
             <a:fld id="{5BCAD085-E8A6-8845-BD4E-CB4CCA059FC4}" type="datetimeFigureOut">
               <a:rPr lang="en-US" smtClean="0"/>
-              <a:t>10/11/2026</a:t>
+              <a:t>10/14/2026</a:t>
             </a:fld>
             <a:endParaRPr lang="en-US"/>
           </a:p>
